--- a/Modules/03-Data-Architect/projects/Project 4 - SneakerPark Data Governance/report/Documentation/sneakerpark_data_governance.pptx
+++ b/Modules/03-Data-Architect/projects/Project 4 - SneakerPark Data Governance/report/Documentation/sneakerpark_data_governance.pptx
@@ -296,7 +296,7 @@
 <file path=ppt/revisionInfo.xml><?xml version="1.0" encoding="utf-8"?>
 <p1510:revInfo xmlns:a="http://schemas.openxmlformats.org/drawingml/2006/main" xmlns:r="http://schemas.openxmlformats.org/officeDocument/2006/relationships" xmlns:p1510="http://schemas.microsoft.com/office/powerpoint/2015/10/main">
   <p1510:revLst>
-    <p1510:client id="{7C95B268-E689-48BE-B304-A84222016C49}" v="63" dt="2026-06-02T05:08:33.114"/>
+    <p1510:client id="{7C95B268-E689-48BE-B304-A84222016C49}" v="66" dt="2026-06-02T05:21:46.552"/>
   </p1510:revLst>
 </p1510:revInfo>
 </file>
@@ -306,7 +306,7 @@
   <pc:docChgLst>
     <pc:chgData name="ARJUN AVALAKKI MOHAN" userId="be4ab9aaf12c5868" providerId="LiveId" clId="{C81E60EF-EF5F-4B4B-A4E1-3178676F15CC}"/>
     <pc:docChg chg="undo custSel delSld modSld">
-      <pc:chgData name="ARJUN AVALAKKI MOHAN" userId="be4ab9aaf12c5868" providerId="LiveId" clId="{C81E60EF-EF5F-4B4B-A4E1-3178676F15CC}" dt="2026-06-02T05:08:38.603" v="607" actId="113"/>
+      <pc:chgData name="ARJUN AVALAKKI MOHAN" userId="be4ab9aaf12c5868" providerId="LiveId" clId="{C81E60EF-EF5F-4B4B-A4E1-3178676F15CC}" dt="2026-06-02T05:21:52.610" v="611" actId="108"/>
       <pc:docMkLst>
         <pc:docMk/>
       </pc:docMkLst>
@@ -363,7 +363,7 @@
         </pc:picChg>
       </pc:sldChg>
       <pc:sldChg chg="addSp delSp modSp mod modNotes">
-        <pc:chgData name="ARJUN AVALAKKI MOHAN" userId="be4ab9aaf12c5868" providerId="LiveId" clId="{C81E60EF-EF5F-4B4B-A4E1-3178676F15CC}" dt="2026-06-02T05:08:38.603" v="607" actId="113"/>
+        <pc:chgData name="ARJUN AVALAKKI MOHAN" userId="be4ab9aaf12c5868" providerId="LiveId" clId="{C81E60EF-EF5F-4B4B-A4E1-3178676F15CC}" dt="2026-06-02T05:21:52.610" v="611" actId="108"/>
         <pc:sldMkLst>
           <pc:docMk/>
           <pc:sldMk cId="0" sldId="265"/>
@@ -377,7 +377,7 @@
           </ac:spMkLst>
         </pc:spChg>
         <pc:spChg chg="add mod">
-          <ac:chgData name="ARJUN AVALAKKI MOHAN" userId="be4ab9aaf12c5868" providerId="LiveId" clId="{C81E60EF-EF5F-4B4B-A4E1-3178676F15CC}" dt="2026-06-02T05:08:38.603" v="607" actId="113"/>
+          <ac:chgData name="ARJUN AVALAKKI MOHAN" userId="be4ab9aaf12c5868" providerId="LiveId" clId="{C81E60EF-EF5F-4B4B-A4E1-3178676F15CC}" dt="2026-06-02T05:21:52.610" v="611" actId="108"/>
           <ac:spMkLst>
             <pc:docMk/>
             <pc:sldMk cId="0" sldId="265"/>
@@ -31912,7 +31912,7 @@
         <p:spPr>
           <a:xfrm>
             <a:off x="373791" y="486774"/>
-            <a:ext cx="7052619" cy="954107"/>
+            <a:ext cx="7052619" cy="1169551"/>
           </a:xfrm>
           <a:prstGeom prst="rect">
             <a:avLst/>
@@ -31964,15 +31964,15 @@
               </a:rPr>
             </a:br>
             <a:r>
-              <a:rPr lang="en-GB" b="1" dirty="0">
+              <a:rPr lang="en-GB" dirty="0">
                 <a:latin typeface="Open Sans" panose="020B0606030504020204" pitchFamily="34" charset="0"/>
                 <a:ea typeface="Open Sans" panose="020B0606030504020204" pitchFamily="34" charset="0"/>
                 <a:cs typeface="Open Sans" panose="020B0606030504020204" pitchFamily="34" charset="0"/>
               </a:rPr>
-              <a:t>Please refer to the attached Metadata </a:t>
+              <a:t>The completed Metadata </a:t>
             </a:r>
             <a:r>
-              <a:rPr lang="en-GB" b="1" dirty="0" err="1">
+              <a:rPr lang="en-GB" dirty="0" err="1">
                 <a:latin typeface="Open Sans" panose="020B0606030504020204" pitchFamily="34" charset="0"/>
                 <a:ea typeface="Open Sans" panose="020B0606030504020204" pitchFamily="34" charset="0"/>
                 <a:cs typeface="Open Sans" panose="020B0606030504020204" pitchFamily="34" charset="0"/>
@@ -31980,12 +31980,12 @@
               <a:t>Catalog</a:t>
             </a:r>
             <a:r>
-              <a:rPr lang="en-GB" b="1" dirty="0">
+              <a:rPr lang="en-GB" dirty="0">
                 <a:latin typeface="Open Sans" panose="020B0606030504020204" pitchFamily="34" charset="0"/>
                 <a:ea typeface="Open Sans" panose="020B0606030504020204" pitchFamily="34" charset="0"/>
                 <a:cs typeface="Open Sans" panose="020B0606030504020204" pitchFamily="34" charset="0"/>
               </a:rPr>
-              <a:t> spreadsheet for full details.</a:t>
+              <a:t> spreadsheet has been provided separately and is available in the project repository:</a:t>
             </a:r>
           </a:p>
         </p:txBody>

--- a/Modules/03-Data-Architect/projects/Project 4 - SneakerPark Data Governance/report/Documentation/sneakerpark_data_governance.pptx
+++ b/Modules/03-Data-Architect/projects/Project 4 - SneakerPark Data Governance/report/Documentation/sneakerpark_data_governance.pptx
@@ -8,52 +8,51 @@
     <p:sldMasterId id="2147483697" r:id="rId4"/>
   </p:sldMasterIdLst>
   <p:notesMasterIdLst>
-    <p:notesMasterId r:id="rId24"/>
+    <p:notesMasterId r:id="rId23"/>
   </p:notesMasterIdLst>
   <p:sldIdLst>
     <p:sldId id="256" r:id="rId5"/>
     <p:sldId id="259" r:id="rId6"/>
     <p:sldId id="260" r:id="rId7"/>
     <p:sldId id="261" r:id="rId8"/>
-    <p:sldId id="262" r:id="rId9"/>
-    <p:sldId id="263" r:id="rId10"/>
-    <p:sldId id="264" r:id="rId11"/>
-    <p:sldId id="265" r:id="rId12"/>
-    <p:sldId id="266" r:id="rId13"/>
-    <p:sldId id="267" r:id="rId14"/>
-    <p:sldId id="268" r:id="rId15"/>
-    <p:sldId id="269" r:id="rId16"/>
-    <p:sldId id="270" r:id="rId17"/>
-    <p:sldId id="271" r:id="rId18"/>
-    <p:sldId id="272" r:id="rId19"/>
-    <p:sldId id="273" r:id="rId20"/>
-    <p:sldId id="274" r:id="rId21"/>
-    <p:sldId id="275" r:id="rId22"/>
-    <p:sldId id="276" r:id="rId23"/>
+    <p:sldId id="263" r:id="rId9"/>
+    <p:sldId id="264" r:id="rId10"/>
+    <p:sldId id="265" r:id="rId11"/>
+    <p:sldId id="266" r:id="rId12"/>
+    <p:sldId id="267" r:id="rId13"/>
+    <p:sldId id="268" r:id="rId14"/>
+    <p:sldId id="269" r:id="rId15"/>
+    <p:sldId id="270" r:id="rId16"/>
+    <p:sldId id="271" r:id="rId17"/>
+    <p:sldId id="272" r:id="rId18"/>
+    <p:sldId id="273" r:id="rId19"/>
+    <p:sldId id="274" r:id="rId20"/>
+    <p:sldId id="275" r:id="rId21"/>
+    <p:sldId id="276" r:id="rId22"/>
   </p:sldIdLst>
   <p:sldSz cx="7772400" cy="10058400"/>
   <p:notesSz cx="6858000" cy="9144000"/>
   <p:embeddedFontLst>
     <p:embeddedFont>
       <p:font typeface="Helvetica Neue" panose="020B0604020202020204" charset="0"/>
-      <p:regular r:id="rId25"/>
-      <p:bold r:id="rId26"/>
-      <p:italic r:id="rId27"/>
-      <p:boldItalic r:id="rId28"/>
+      <p:regular r:id="rId24"/>
+      <p:bold r:id="rId25"/>
+      <p:italic r:id="rId26"/>
+      <p:boldItalic r:id="rId27"/>
     </p:embeddedFont>
     <p:embeddedFont>
       <p:font typeface="Open Sans" panose="020B0606030504020204" pitchFamily="34" charset="0"/>
-      <p:regular r:id="rId29"/>
-      <p:bold r:id="rId30"/>
-      <p:italic r:id="rId31"/>
-      <p:boldItalic r:id="rId32"/>
+      <p:regular r:id="rId28"/>
+      <p:bold r:id="rId29"/>
+      <p:italic r:id="rId30"/>
+      <p:boldItalic r:id="rId31"/>
     </p:embeddedFont>
     <p:embeddedFont>
       <p:font typeface="Open Sans Light" panose="020B0306030504020204" pitchFamily="34" charset="0"/>
-      <p:regular r:id="rId33"/>
-      <p:bold r:id="rId34"/>
-      <p:italic r:id="rId35"/>
-      <p:boldItalic r:id="rId36"/>
+      <p:regular r:id="rId32"/>
+      <p:bold r:id="rId33"/>
+      <p:italic r:id="rId34"/>
+      <p:boldItalic r:id="rId35"/>
     </p:embeddedFont>
   </p:embeddedFontLst>
   <p:defaultTextStyle>
@@ -296,7 +295,7 @@
 <file path=ppt/revisionInfo.xml><?xml version="1.0" encoding="utf-8"?>
 <p1510:revInfo xmlns:a="http://schemas.openxmlformats.org/drawingml/2006/main" xmlns:r="http://schemas.openxmlformats.org/officeDocument/2006/relationships" xmlns:p1510="http://schemas.microsoft.com/office/powerpoint/2015/10/main">
   <p1510:revLst>
-    <p1510:client id="{7C95B268-E689-48BE-B304-A84222016C49}" v="66" dt="2026-06-02T05:21:46.552"/>
+    <p1510:client id="{7C95B268-E689-48BE-B304-A84222016C49}" v="85" dt="2026-06-02T06:02:36.049"/>
   </p1510:revLst>
 </p1510:revInfo>
 </file>
@@ -306,18 +305,18 @@
   <pc:docChgLst>
     <pc:chgData name="ARJUN AVALAKKI MOHAN" userId="be4ab9aaf12c5868" providerId="LiveId" clId="{C81E60EF-EF5F-4B4B-A4E1-3178676F15CC}"/>
     <pc:docChg chg="undo custSel delSld modSld">
-      <pc:chgData name="ARJUN AVALAKKI MOHAN" userId="be4ab9aaf12c5868" providerId="LiveId" clId="{C81E60EF-EF5F-4B4B-A4E1-3178676F15CC}" dt="2026-06-02T05:21:52.610" v="611" actId="108"/>
+      <pc:chgData name="ARJUN AVALAKKI MOHAN" userId="be4ab9aaf12c5868" providerId="LiveId" clId="{C81E60EF-EF5F-4B4B-A4E1-3178676F15CC}" dt="2026-06-02T06:02:43.069" v="762" actId="14100"/>
       <pc:docMkLst>
         <pc:docMk/>
       </pc:docMkLst>
       <pc:sldChg chg="modSp mod">
-        <pc:chgData name="ARJUN AVALAKKI MOHAN" userId="be4ab9aaf12c5868" providerId="LiveId" clId="{C81E60EF-EF5F-4B4B-A4E1-3178676F15CC}" dt="2026-05-26T05:05:20.746" v="29" actId="20577"/>
+        <pc:chgData name="ARJUN AVALAKKI MOHAN" userId="be4ab9aaf12c5868" providerId="LiveId" clId="{C81E60EF-EF5F-4B4B-A4E1-3178676F15CC}" dt="2026-06-02T05:44:14.135" v="728" actId="20577"/>
         <pc:sldMkLst>
           <pc:docMk/>
           <pc:sldMk cId="0" sldId="256"/>
         </pc:sldMkLst>
         <pc:spChg chg="mod">
-          <ac:chgData name="ARJUN AVALAKKI MOHAN" userId="be4ab9aaf12c5868" providerId="LiveId" clId="{C81E60EF-EF5F-4B4B-A4E1-3178676F15CC}" dt="2026-05-26T05:05:20.746" v="29" actId="20577"/>
+          <ac:chgData name="ARJUN AVALAKKI MOHAN" userId="be4ab9aaf12c5868" providerId="LiveId" clId="{C81E60EF-EF5F-4B4B-A4E1-3178676F15CC}" dt="2026-06-02T05:44:14.135" v="728" actId="20577"/>
           <ac:spMkLst>
             <pc:docMk/>
             <pc:sldMk cId="0" sldId="256"/>
@@ -337,6 +336,13 @@
         <pc:sldMkLst>
           <pc:docMk/>
           <pc:sldMk cId="0" sldId="258"/>
+        </pc:sldMkLst>
+      </pc:sldChg>
+      <pc:sldChg chg="del">
+        <pc:chgData name="ARJUN AVALAKKI MOHAN" userId="be4ab9aaf12c5868" providerId="LiveId" clId="{C81E60EF-EF5F-4B4B-A4E1-3178676F15CC}" dt="2026-06-02T05:46:33.851" v="732" actId="2696"/>
+        <pc:sldMkLst>
+          <pc:docMk/>
+          <pc:sldMk cId="0" sldId="262"/>
         </pc:sldMkLst>
       </pc:sldChg>
       <pc:sldChg chg="addSp delSp modSp mod">
@@ -363,7 +369,7 @@
         </pc:picChg>
       </pc:sldChg>
       <pc:sldChg chg="addSp delSp modSp mod modNotes">
-        <pc:chgData name="ARJUN AVALAKKI MOHAN" userId="be4ab9aaf12c5868" providerId="LiveId" clId="{C81E60EF-EF5F-4B4B-A4E1-3178676F15CC}" dt="2026-06-02T05:21:52.610" v="611" actId="108"/>
+        <pc:chgData name="ARJUN AVALAKKI MOHAN" userId="be4ab9aaf12c5868" providerId="LiveId" clId="{C81E60EF-EF5F-4B4B-A4E1-3178676F15CC}" dt="2026-06-02T06:01:55.586" v="752" actId="20577"/>
         <pc:sldMkLst>
           <pc:docMk/>
           <pc:sldMk cId="0" sldId="265"/>
@@ -377,7 +383,7 @@
           </ac:spMkLst>
         </pc:spChg>
         <pc:spChg chg="add mod">
-          <ac:chgData name="ARJUN AVALAKKI MOHAN" userId="be4ab9aaf12c5868" providerId="LiveId" clId="{C81E60EF-EF5F-4B4B-A4E1-3178676F15CC}" dt="2026-06-02T05:21:52.610" v="611" actId="108"/>
+          <ac:chgData name="ARJUN AVALAKKI MOHAN" userId="be4ab9aaf12c5868" providerId="LiveId" clId="{C81E60EF-EF5F-4B4B-A4E1-3178676F15CC}" dt="2026-06-02T06:01:55.586" v="752" actId="20577"/>
           <ac:spMkLst>
             <pc:docMk/>
             <pc:sldMk cId="0" sldId="265"/>
@@ -390,6 +396,45 @@
             <pc:docMk/>
             <pc:sldMk cId="0" sldId="265"/>
             <ac:spMk id="241" creationId="{00000000-0000-0000-0000-000000000000}"/>
+          </ac:spMkLst>
+        </pc:spChg>
+        <pc:graphicFrameChg chg="add del mod">
+          <ac:chgData name="ARJUN AVALAKKI MOHAN" userId="be4ab9aaf12c5868" providerId="LiveId" clId="{C81E60EF-EF5F-4B4B-A4E1-3178676F15CC}" dt="2026-06-02T05:24:32.887" v="616" actId="478"/>
+          <ac:graphicFrameMkLst>
+            <pc:docMk/>
+            <pc:sldMk cId="0" sldId="265"/>
+            <ac:graphicFrameMk id="2" creationId="{77692009-745C-956A-BC1F-A3F84A178345}"/>
+          </ac:graphicFrameMkLst>
+        </pc:graphicFrameChg>
+        <pc:graphicFrameChg chg="add del mod">
+          <ac:chgData name="ARJUN AVALAKKI MOHAN" userId="be4ab9aaf12c5868" providerId="LiveId" clId="{C81E60EF-EF5F-4B4B-A4E1-3178676F15CC}" dt="2026-06-02T05:26:07.007" v="654" actId="478"/>
+          <ac:graphicFrameMkLst>
+            <pc:docMk/>
+            <pc:sldMk cId="0" sldId="265"/>
+            <ac:graphicFrameMk id="3" creationId="{1E38200A-0006-2AA5-E782-AD8FCA1BADC2}"/>
+          </ac:graphicFrameMkLst>
+        </pc:graphicFrameChg>
+        <pc:graphicFrameChg chg="add del mod">
+          <ac:chgData name="ARJUN AVALAKKI MOHAN" userId="be4ab9aaf12c5868" providerId="LiveId" clId="{C81E60EF-EF5F-4B4B-A4E1-3178676F15CC}" dt="2026-06-02T05:27:09.737" v="680" actId="478"/>
+          <ac:graphicFrameMkLst>
+            <pc:docMk/>
+            <pc:sldMk cId="0" sldId="265"/>
+            <ac:graphicFrameMk id="4" creationId="{BE1058CA-DD3B-9E00-69FC-6F1794D64D90}"/>
+          </ac:graphicFrameMkLst>
+        </pc:graphicFrameChg>
+      </pc:sldChg>
+      <pc:sldChg chg="modSp mod modNotes">
+        <pc:chgData name="ARJUN AVALAKKI MOHAN" userId="be4ab9aaf12c5868" providerId="LiveId" clId="{C81E60EF-EF5F-4B4B-A4E1-3178676F15CC}" dt="2026-06-02T06:02:43.069" v="762" actId="14100"/>
+        <pc:sldMkLst>
+          <pc:docMk/>
+          <pc:sldMk cId="0" sldId="267"/>
+        </pc:sldMkLst>
+        <pc:spChg chg="mod">
+          <ac:chgData name="ARJUN AVALAKKI MOHAN" userId="be4ab9aaf12c5868" providerId="LiveId" clId="{C81E60EF-EF5F-4B4B-A4E1-3178676F15CC}" dt="2026-06-02T06:02:43.069" v="762" actId="14100"/>
+          <ac:spMkLst>
+            <pc:docMk/>
+            <pc:sldMk cId="0" sldId="267"/>
+            <ac:spMk id="252" creationId="{00000000-0000-0000-0000-000000000000}"/>
           </ac:spMkLst>
         </pc:spChg>
       </pc:sldChg>
@@ -558,13 +603,13 @@
         </pc:graphicFrameChg>
       </pc:sldChg>
       <pc:sldChg chg="addSp delSp modSp mod">
-        <pc:chgData name="ARJUN AVALAKKI MOHAN" userId="be4ab9aaf12c5868" providerId="LiveId" clId="{C81E60EF-EF5F-4B4B-A4E1-3178676F15CC}" dt="2026-06-02T05:05:10.293" v="590" actId="20577"/>
+        <pc:chgData name="ARJUN AVALAKKI MOHAN" userId="be4ab9aaf12c5868" providerId="LiveId" clId="{C81E60EF-EF5F-4B4B-A4E1-3178676F15CC}" dt="2026-06-02T05:54:34.832" v="741" actId="20577"/>
         <pc:sldMkLst>
           <pc:docMk/>
           <pc:sldMk cId="0" sldId="276"/>
         </pc:sldMkLst>
         <pc:spChg chg="add mod">
-          <ac:chgData name="ARJUN AVALAKKI MOHAN" userId="be4ab9aaf12c5868" providerId="LiveId" clId="{C81E60EF-EF5F-4B4B-A4E1-3178676F15CC}" dt="2026-06-02T05:05:10.293" v="590" actId="20577"/>
+          <ac:chgData name="ARJUN AVALAKKI MOHAN" userId="be4ab9aaf12c5868" providerId="LiveId" clId="{C81E60EF-EF5F-4B4B-A4E1-3178676F15CC}" dt="2026-06-02T05:54:34.832" v="741" actId="20577"/>
           <ac:spMkLst>
             <pc:docMk/>
             <pc:sldMk cId="0" sldId="276"/>
@@ -1149,110 +1194,6 @@
   <p:cSld>
     <p:spTree>
       <p:nvGrpSpPr>
-        <p:cNvPr id="1" name="Shape 248"/>
-        <p:cNvGrpSpPr/>
-        <p:nvPr/>
-      </p:nvGrpSpPr>
-      <p:grpSpPr>
-        <a:xfrm>
-          <a:off x="0" y="0"/>
-          <a:ext cx="0" cy="0"/>
-          <a:chOff x="0" y="0"/>
-          <a:chExt cx="0" cy="0"/>
-        </a:xfrm>
-      </p:grpSpPr>
-      <p:sp>
-        <p:nvSpPr>
-          <p:cNvPr id="249" name="Google Shape;249;ga1e537952f_0_14:notes"/>
-          <p:cNvSpPr>
-            <a:spLocks noGrp="1" noRot="1" noChangeAspect="1"/>
-          </p:cNvSpPr>
-          <p:nvPr>
-            <p:ph type="sldImg" idx="2"/>
-          </p:nvPr>
-        </p:nvSpPr>
-        <p:spPr>
-          <a:xfrm>
-            <a:off x="2104459" y="685800"/>
-            <a:ext cx="2649600" cy="3429000"/>
-          </a:xfrm>
-          <a:custGeom>
-            <a:avLst/>
-            <a:gdLst/>
-            <a:ahLst/>
-            <a:cxnLst/>
-            <a:rect l="l" t="t" r="r" b="b"/>
-            <a:pathLst>
-              <a:path w="120000" h="120000" extrusionOk="0">
-                <a:moveTo>
-                  <a:pt x="0" y="0"/>
-                </a:moveTo>
-                <a:lnTo>
-                  <a:pt x="120000" y="0"/>
-                </a:lnTo>
-                <a:lnTo>
-                  <a:pt x="120000" y="120000"/>
-                </a:lnTo>
-                <a:lnTo>
-                  <a:pt x="0" y="120000"/>
-                </a:lnTo>
-                <a:close/>
-              </a:path>
-            </a:pathLst>
-          </a:custGeom>
-        </p:spPr>
-      </p:sp>
-      <p:sp>
-        <p:nvSpPr>
-          <p:cNvPr id="250" name="Google Shape;250;ga1e537952f_0_14:notes"/>
-          <p:cNvSpPr txBox="1">
-            <a:spLocks noGrp="1"/>
-          </p:cNvSpPr>
-          <p:nvPr>
-            <p:ph type="body" idx="1"/>
-          </p:nvPr>
-        </p:nvSpPr>
-        <p:spPr>
-          <a:xfrm>
-            <a:off x="685800" y="4343400"/>
-            <a:ext cx="5486400" cy="4114800"/>
-          </a:xfrm>
-          <a:prstGeom prst="rect">
-            <a:avLst/>
-          </a:prstGeom>
-        </p:spPr>
-        <p:txBody>
-          <a:bodyPr spcFirstLastPara="1" wrap="square" lIns="91425" tIns="91425" rIns="91425" bIns="91425" anchor="t" anchorCtr="0">
-            <a:noAutofit/>
-          </a:bodyPr>
-          <a:lstStyle/>
-          <a:p>
-            <a:pPr marL="0" lvl="0" indent="0" algn="l" rtl="0">
-              <a:spcBef>
-                <a:spcPts val="0"/>
-              </a:spcBef>
-              <a:spcAft>
-                <a:spcPts val="0"/>
-              </a:spcAft>
-              <a:buNone/>
-            </a:pPr>
-            <a:endParaRPr/>
-          </a:p>
-        </p:txBody>
-      </p:sp>
-    </p:spTree>
-  </p:cSld>
-  <p:clrMapOvr>
-    <a:masterClrMapping/>
-  </p:clrMapOvr>
-</p:notes>
-</file>
-
-<file path=ppt/notesSlides/notesSlide11.xml><?xml version="1.0" encoding="utf-8"?>
-<p:notes xmlns:a="http://schemas.openxmlformats.org/drawingml/2006/main" xmlns:r="http://schemas.openxmlformats.org/officeDocument/2006/relationships" xmlns:p="http://schemas.openxmlformats.org/presentationml/2006/main" showMasterSp="0" showMasterPhAnim="0">
-  <p:cSld>
-    <p:spTree>
-      <p:nvGrpSpPr>
         <p:cNvPr id="1" name="Shape 253"/>
         <p:cNvGrpSpPr/>
         <p:nvPr/>
@@ -1356,7 +1297,7 @@
 </p:notes>
 </file>
 
-<file path=ppt/notesSlides/notesSlide12.xml><?xml version="1.0" encoding="utf-8"?>
+<file path=ppt/notesSlides/notesSlide11.xml><?xml version="1.0" encoding="utf-8"?>
 <p:notes xmlns:a="http://schemas.openxmlformats.org/drawingml/2006/main" xmlns:r="http://schemas.openxmlformats.org/officeDocument/2006/relationships" xmlns:p="http://schemas.openxmlformats.org/presentationml/2006/main" showMasterSp="0" showMasterPhAnim="0">
   <p:cSld>
     <p:spTree>
@@ -1460,7 +1401,7 @@
 </p:notes>
 </file>
 
-<file path=ppt/notesSlides/notesSlide13.xml><?xml version="1.0" encoding="utf-8"?>
+<file path=ppt/notesSlides/notesSlide12.xml><?xml version="1.0" encoding="utf-8"?>
 <p:notes xmlns:a="http://schemas.openxmlformats.org/drawingml/2006/main" xmlns:r="http://schemas.openxmlformats.org/officeDocument/2006/relationships" xmlns:p="http://schemas.openxmlformats.org/presentationml/2006/main" showMasterSp="0" showMasterPhAnim="0">
   <p:cSld>
     <p:spTree>
@@ -1568,7 +1509,7 @@
 </p:notes>
 </file>
 
-<file path=ppt/notesSlides/notesSlide14.xml><?xml version="1.0" encoding="utf-8"?>
+<file path=ppt/notesSlides/notesSlide13.xml><?xml version="1.0" encoding="utf-8"?>
 <p:notes xmlns:a="http://schemas.openxmlformats.org/drawingml/2006/main" xmlns:r="http://schemas.openxmlformats.org/officeDocument/2006/relationships" xmlns:p="http://schemas.openxmlformats.org/presentationml/2006/main" showMasterSp="0" showMasterPhAnim="0">
   <p:cSld>
     <p:spTree>
@@ -1672,7 +1613,7 @@
 </p:notes>
 </file>
 
-<file path=ppt/notesSlides/notesSlide15.xml><?xml version="1.0" encoding="utf-8"?>
+<file path=ppt/notesSlides/notesSlide14.xml><?xml version="1.0" encoding="utf-8"?>
 <p:notes xmlns:a="http://schemas.openxmlformats.org/drawingml/2006/main" xmlns:r="http://schemas.openxmlformats.org/officeDocument/2006/relationships" xmlns:p="http://schemas.openxmlformats.org/presentationml/2006/main" showMasterSp="0" showMasterPhAnim="0">
   <p:cSld>
     <p:spTree>
@@ -1776,7 +1717,7 @@
 </p:notes>
 </file>
 
-<file path=ppt/notesSlides/notesSlide16.xml><?xml version="1.0" encoding="utf-8"?>
+<file path=ppt/notesSlides/notesSlide15.xml><?xml version="1.0" encoding="utf-8"?>
 <p:notes xmlns:a="http://schemas.openxmlformats.org/drawingml/2006/main" xmlns:r="http://schemas.openxmlformats.org/officeDocument/2006/relationships" xmlns:p="http://schemas.openxmlformats.org/presentationml/2006/main" showMasterSp="0" showMasterPhAnim="0">
   <p:cSld>
     <p:spTree>
@@ -1884,7 +1825,7 @@
 </p:notes>
 </file>
 
-<file path=ppt/notesSlides/notesSlide17.xml><?xml version="1.0" encoding="utf-8"?>
+<file path=ppt/notesSlides/notesSlide16.xml><?xml version="1.0" encoding="utf-8"?>
 <p:notes xmlns:a="http://schemas.openxmlformats.org/drawingml/2006/main" xmlns:r="http://schemas.openxmlformats.org/officeDocument/2006/relationships" xmlns:p="http://schemas.openxmlformats.org/presentationml/2006/main" showMasterSp="0" showMasterPhAnim="0">
   <p:cSld>
     <p:spTree>
@@ -1988,7 +1929,7 @@
 </p:notes>
 </file>
 
-<file path=ppt/notesSlides/notesSlide18.xml><?xml version="1.0" encoding="utf-8"?>
+<file path=ppt/notesSlides/notesSlide17.xml><?xml version="1.0" encoding="utf-8"?>
 <p:notes xmlns:a="http://schemas.openxmlformats.org/drawingml/2006/main" xmlns:r="http://schemas.openxmlformats.org/officeDocument/2006/relationships" xmlns:p="http://schemas.openxmlformats.org/presentationml/2006/main" showMasterSp="0" showMasterPhAnim="0">
   <p:cSld>
     <p:spTree>
@@ -2096,7 +2037,7 @@
 </p:notes>
 </file>
 
-<file path=ppt/notesSlides/notesSlide19.xml><?xml version="1.0" encoding="utf-8"?>
+<file path=ppt/notesSlides/notesSlide18.xml><?xml version="1.0" encoding="utf-8"?>
 <p:notes xmlns:a="http://schemas.openxmlformats.org/drawingml/2006/main" xmlns:r="http://schemas.openxmlformats.org/officeDocument/2006/relationships" xmlns:p="http://schemas.openxmlformats.org/presentationml/2006/main" showMasterSp="0" showMasterPhAnim="0">
   <p:cSld>
     <p:spTree>
@@ -2521,110 +2462,6 @@
   <p:cSld>
     <p:spTree>
       <p:nvGrpSpPr>
-        <p:cNvPr id="1" name="Shape 219"/>
-        <p:cNvGrpSpPr/>
-        <p:nvPr/>
-      </p:nvGrpSpPr>
-      <p:grpSpPr>
-        <a:xfrm>
-          <a:off x="0" y="0"/>
-          <a:ext cx="0" cy="0"/>
-          <a:chOff x="0" y="0"/>
-          <a:chExt cx="0" cy="0"/>
-        </a:xfrm>
-      </p:grpSpPr>
-      <p:sp>
-        <p:nvSpPr>
-          <p:cNvPr id="220" name="Google Shape;220;g9c24cf9085_0_4:notes"/>
-          <p:cNvSpPr>
-            <a:spLocks noGrp="1" noRot="1" noChangeAspect="1"/>
-          </p:cNvSpPr>
-          <p:nvPr>
-            <p:ph type="sldImg" idx="2"/>
-          </p:nvPr>
-        </p:nvSpPr>
-        <p:spPr>
-          <a:xfrm>
-            <a:off x="2104459" y="685800"/>
-            <a:ext cx="2649600" cy="3429000"/>
-          </a:xfrm>
-          <a:custGeom>
-            <a:avLst/>
-            <a:gdLst/>
-            <a:ahLst/>
-            <a:cxnLst/>
-            <a:rect l="l" t="t" r="r" b="b"/>
-            <a:pathLst>
-              <a:path w="120000" h="120000" extrusionOk="0">
-                <a:moveTo>
-                  <a:pt x="0" y="0"/>
-                </a:moveTo>
-                <a:lnTo>
-                  <a:pt x="120000" y="0"/>
-                </a:lnTo>
-                <a:lnTo>
-                  <a:pt x="120000" y="120000"/>
-                </a:lnTo>
-                <a:lnTo>
-                  <a:pt x="0" y="120000"/>
-                </a:lnTo>
-                <a:close/>
-              </a:path>
-            </a:pathLst>
-          </a:custGeom>
-        </p:spPr>
-      </p:sp>
-      <p:sp>
-        <p:nvSpPr>
-          <p:cNvPr id="221" name="Google Shape;221;g9c24cf9085_0_4:notes"/>
-          <p:cNvSpPr txBox="1">
-            <a:spLocks noGrp="1"/>
-          </p:cNvSpPr>
-          <p:nvPr>
-            <p:ph type="body" idx="1"/>
-          </p:nvPr>
-        </p:nvSpPr>
-        <p:spPr>
-          <a:xfrm>
-            <a:off x="685800" y="4343400"/>
-            <a:ext cx="5486400" cy="4114800"/>
-          </a:xfrm>
-          <a:prstGeom prst="rect">
-            <a:avLst/>
-          </a:prstGeom>
-        </p:spPr>
-        <p:txBody>
-          <a:bodyPr spcFirstLastPara="1" wrap="square" lIns="91425" tIns="91425" rIns="91425" bIns="91425" anchor="t" anchorCtr="0">
-            <a:noAutofit/>
-          </a:bodyPr>
-          <a:lstStyle/>
-          <a:p>
-            <a:pPr marL="0" lvl="0" indent="0" algn="l" rtl="0">
-              <a:spcBef>
-                <a:spcPts val="0"/>
-              </a:spcBef>
-              <a:spcAft>
-                <a:spcPts val="0"/>
-              </a:spcAft>
-              <a:buNone/>
-            </a:pPr>
-            <a:endParaRPr/>
-          </a:p>
-        </p:txBody>
-      </p:sp>
-    </p:spTree>
-  </p:cSld>
-  <p:clrMapOvr>
-    <a:masterClrMapping/>
-  </p:clrMapOvr>
-</p:notes>
-</file>
-
-<file path=ppt/notesSlides/notesSlide6.xml><?xml version="1.0" encoding="utf-8"?>
-<p:notes xmlns:a="http://schemas.openxmlformats.org/drawingml/2006/main" xmlns:r="http://schemas.openxmlformats.org/officeDocument/2006/relationships" xmlns:p="http://schemas.openxmlformats.org/presentationml/2006/main" showMasterSp="0" showMasterPhAnim="0">
-  <p:cSld>
-    <p:spTree>
-      <p:nvGrpSpPr>
         <p:cNvPr id="1" name="Shape 225"/>
         <p:cNvGrpSpPr/>
         <p:nvPr/>
@@ -2724,7 +2561,7 @@
 </p:notes>
 </file>
 
-<file path=ppt/notesSlides/notesSlide7.xml><?xml version="1.0" encoding="utf-8"?>
+<file path=ppt/notesSlides/notesSlide6.xml><?xml version="1.0" encoding="utf-8"?>
 <p:notes xmlns:a="http://schemas.openxmlformats.org/drawingml/2006/main" xmlns:r="http://schemas.openxmlformats.org/officeDocument/2006/relationships" xmlns:p="http://schemas.openxmlformats.org/presentationml/2006/main" showMasterSp="0" showMasterPhAnim="0">
   <p:cSld>
     <p:spTree>
@@ -2832,7 +2669,7 @@
 </p:notes>
 </file>
 
-<file path=ppt/notesSlides/notesSlide8.xml><?xml version="1.0" encoding="utf-8"?>
+<file path=ppt/notesSlides/notesSlide7.xml><?xml version="1.0" encoding="utf-8"?>
 <p:notes xmlns:a="http://schemas.openxmlformats.org/drawingml/2006/main" xmlns:r="http://schemas.openxmlformats.org/officeDocument/2006/relationships" xmlns:p="http://schemas.openxmlformats.org/presentationml/2006/main" showMasterSp="0" showMasterPhAnim="0">
   <p:cSld>
     <p:spTree>
@@ -2936,7 +2773,7 @@
 </p:notes>
 </file>
 
-<file path=ppt/notesSlides/notesSlide9.xml><?xml version="1.0" encoding="utf-8"?>
+<file path=ppt/notesSlides/notesSlide8.xml><?xml version="1.0" encoding="utf-8"?>
 <p:notes xmlns:a="http://schemas.openxmlformats.org/drawingml/2006/main" xmlns:r="http://schemas.openxmlformats.org/officeDocument/2006/relationships" xmlns:p="http://schemas.openxmlformats.org/presentationml/2006/main" showMasterSp="0" showMasterPhAnim="0">
   <p:cSld>
     <p:spTree>
@@ -3035,6 +2872,110 @@
             </a:pathLst>
           </a:custGeom>
         </p:spPr>
+      </p:sp>
+    </p:spTree>
+  </p:cSld>
+  <p:clrMapOvr>
+    <a:masterClrMapping/>
+  </p:clrMapOvr>
+</p:notes>
+</file>
+
+<file path=ppt/notesSlides/notesSlide9.xml><?xml version="1.0" encoding="utf-8"?>
+<p:notes xmlns:a="http://schemas.openxmlformats.org/drawingml/2006/main" xmlns:r="http://schemas.openxmlformats.org/officeDocument/2006/relationships" xmlns:p="http://schemas.openxmlformats.org/presentationml/2006/main" showMasterSp="0" showMasterPhAnim="0">
+  <p:cSld>
+    <p:spTree>
+      <p:nvGrpSpPr>
+        <p:cNvPr id="1" name="Shape 248"/>
+        <p:cNvGrpSpPr/>
+        <p:nvPr/>
+      </p:nvGrpSpPr>
+      <p:grpSpPr>
+        <a:xfrm>
+          <a:off x="0" y="0"/>
+          <a:ext cx="0" cy="0"/>
+          <a:chOff x="0" y="0"/>
+          <a:chExt cx="0" cy="0"/>
+        </a:xfrm>
+      </p:grpSpPr>
+      <p:sp>
+        <p:nvSpPr>
+          <p:cNvPr id="249" name="Google Shape;249;ga1e537952f_0_14:notes"/>
+          <p:cNvSpPr>
+            <a:spLocks noGrp="1" noRot="1" noChangeAspect="1"/>
+          </p:cNvSpPr>
+          <p:nvPr>
+            <p:ph type="sldImg" idx="2"/>
+          </p:nvPr>
+        </p:nvSpPr>
+        <p:spPr>
+          <a:xfrm>
+            <a:off x="2105025" y="685800"/>
+            <a:ext cx="2649538" cy="3429000"/>
+          </a:xfrm>
+          <a:custGeom>
+            <a:avLst/>
+            <a:gdLst/>
+            <a:ahLst/>
+            <a:cxnLst/>
+            <a:rect l="l" t="t" r="r" b="b"/>
+            <a:pathLst>
+              <a:path w="120000" h="120000" extrusionOk="0">
+                <a:moveTo>
+                  <a:pt x="0" y="0"/>
+                </a:moveTo>
+                <a:lnTo>
+                  <a:pt x="120000" y="0"/>
+                </a:lnTo>
+                <a:lnTo>
+                  <a:pt x="120000" y="120000"/>
+                </a:lnTo>
+                <a:lnTo>
+                  <a:pt x="0" y="120000"/>
+                </a:lnTo>
+                <a:close/>
+              </a:path>
+            </a:pathLst>
+          </a:custGeom>
+        </p:spPr>
+      </p:sp>
+      <p:sp>
+        <p:nvSpPr>
+          <p:cNvPr id="250" name="Google Shape;250;ga1e537952f_0_14:notes"/>
+          <p:cNvSpPr txBox="1">
+            <a:spLocks noGrp="1"/>
+          </p:cNvSpPr>
+          <p:nvPr>
+            <p:ph type="body" idx="1"/>
+          </p:nvPr>
+        </p:nvSpPr>
+        <p:spPr>
+          <a:xfrm>
+            <a:off x="685800" y="4343400"/>
+            <a:ext cx="5486400" cy="4114800"/>
+          </a:xfrm>
+          <a:prstGeom prst="rect">
+            <a:avLst/>
+          </a:prstGeom>
+        </p:spPr>
+        <p:txBody>
+          <a:bodyPr spcFirstLastPara="1" wrap="square" lIns="91425" tIns="91425" rIns="91425" bIns="91425" anchor="t" anchorCtr="0">
+            <a:noAutofit/>
+          </a:bodyPr>
+          <a:lstStyle/>
+          <a:p>
+            <a:pPr marL="0" lvl="0" indent="0" algn="l" rtl="0">
+              <a:spcBef>
+                <a:spcPts val="0"/>
+              </a:spcBef>
+              <a:spcAft>
+                <a:spcPts val="0"/>
+              </a:spcAft>
+              <a:buNone/>
+            </a:pPr>
+            <a:endParaRPr/>
+          </a:p>
+        </p:txBody>
       </p:sp>
     </p:spTree>
   </p:cSld>
@@ -27132,7 +27073,7 @@
                 <a:cs typeface="Open Sans"/>
                 <a:sym typeface="Open Sans"/>
               </a:rPr>
-              <a:t>Submitted on: </a:t>
+              <a:t>Submitted on: 02/06/2026</a:t>
             </a:r>
             <a:endParaRPr i="1" dirty="0">
               <a:solidFill>
@@ -27155,255 +27096,6 @@
 </file>
 
 <file path=ppt/slides/slide10.xml><?xml version="1.0" encoding="utf-8"?>
-<p:sld xmlns:a="http://schemas.openxmlformats.org/drawingml/2006/main" xmlns:r="http://schemas.openxmlformats.org/officeDocument/2006/relationships" xmlns:p="http://schemas.openxmlformats.org/presentationml/2006/main">
-  <p:cSld>
-    <p:spTree>
-      <p:nvGrpSpPr>
-        <p:cNvPr id="1" name="Shape 251"/>
-        <p:cNvGrpSpPr/>
-        <p:nvPr/>
-      </p:nvGrpSpPr>
-      <p:grpSpPr>
-        <a:xfrm>
-          <a:off x="0" y="0"/>
-          <a:ext cx="0" cy="0"/>
-          <a:chOff x="0" y="0"/>
-          <a:chExt cx="0" cy="0"/>
-        </a:xfrm>
-      </p:grpSpPr>
-      <p:sp>
-        <p:nvSpPr>
-          <p:cNvPr id="252" name="Google Shape;252;p62"/>
-          <p:cNvSpPr txBox="1"/>
-          <p:nvPr/>
-        </p:nvSpPr>
-        <p:spPr>
-          <a:xfrm>
-            <a:off x="504500" y="425675"/>
-            <a:ext cx="6810600" cy="3000000"/>
-          </a:xfrm>
-          <a:prstGeom prst="rect">
-            <a:avLst/>
-          </a:prstGeom>
-          <a:noFill/>
-          <a:ln>
-            <a:noFill/>
-          </a:ln>
-        </p:spPr>
-        <p:txBody>
-          <a:bodyPr spcFirstLastPara="1" wrap="square" lIns="91425" tIns="91425" rIns="91425" bIns="91425" anchor="t" anchorCtr="0">
-            <a:noAutofit/>
-          </a:bodyPr>
-          <a:lstStyle/>
-          <a:p>
-            <a:pPr marL="0" lvl="0" indent="0" algn="just" rtl="0">
-              <a:lnSpc>
-                <a:spcPct val="170000"/>
-              </a:lnSpc>
-              <a:spcBef>
-                <a:spcPts val="0"/>
-              </a:spcBef>
-              <a:spcAft>
-                <a:spcPts val="0"/>
-              </a:spcAft>
-              <a:buNone/>
-            </a:pPr>
-            <a:r>
-              <a:rPr lang="en" sz="1600">
-                <a:solidFill>
-                  <a:srgbClr val="525C65"/>
-                </a:solidFill>
-                <a:highlight>
-                  <a:srgbClr val="FFFFFF"/>
-                </a:highlight>
-                <a:latin typeface="Open Sans"/>
-                <a:ea typeface="Open Sans"/>
-                <a:cs typeface="Open Sans"/>
-                <a:sym typeface="Open Sans"/>
-              </a:rPr>
-              <a:t>Profile the data to identify at least </a:t>
-            </a:r>
-            <a:r>
-              <a:rPr lang="en" sz="1600" b="1">
-                <a:solidFill>
-                  <a:srgbClr val="525C65"/>
-                </a:solidFill>
-                <a:highlight>
-                  <a:srgbClr val="FFFFFF"/>
-                </a:highlight>
-                <a:latin typeface="Open Sans"/>
-                <a:ea typeface="Open Sans"/>
-                <a:cs typeface="Open Sans"/>
-                <a:sym typeface="Open Sans"/>
-              </a:rPr>
-              <a:t>3 data quality issues</a:t>
-            </a:r>
-            <a:r>
-              <a:rPr lang="en" sz="1600">
-                <a:solidFill>
-                  <a:srgbClr val="525C65"/>
-                </a:solidFill>
-                <a:highlight>
-                  <a:srgbClr val="FFFFFF"/>
-                </a:highlight>
-                <a:latin typeface="Open Sans"/>
-                <a:ea typeface="Open Sans"/>
-                <a:cs typeface="Open Sans"/>
-                <a:sym typeface="Open Sans"/>
-              </a:rPr>
-              <a:t> you see in the data. Also provide </a:t>
-            </a:r>
-            <a:r>
-              <a:rPr lang="en" sz="1600" b="1">
-                <a:solidFill>
-                  <a:srgbClr val="525C65"/>
-                </a:solidFill>
-                <a:highlight>
-                  <a:srgbClr val="FFFFFF"/>
-                </a:highlight>
-                <a:latin typeface="Open Sans"/>
-                <a:ea typeface="Open Sans"/>
-                <a:cs typeface="Open Sans"/>
-                <a:sym typeface="Open Sans"/>
-              </a:rPr>
-              <a:t>at least 1 data quality issue that you haven’t yet seen</a:t>
-            </a:r>
-            <a:r>
-              <a:rPr lang="en" sz="1600">
-                <a:solidFill>
-                  <a:srgbClr val="525C65"/>
-                </a:solidFill>
-                <a:highlight>
-                  <a:srgbClr val="FFFFFF"/>
-                </a:highlight>
-                <a:latin typeface="Open Sans"/>
-                <a:ea typeface="Open Sans"/>
-                <a:cs typeface="Open Sans"/>
-                <a:sym typeface="Open Sans"/>
-              </a:rPr>
-              <a:t> in the data, but can foresee occurring in the future. Based on the issues you’ve identified, come up with the data quality rule for each data quality issue, including for the one that you foresee.</a:t>
-            </a:r>
-            <a:endParaRPr sz="1600">
-              <a:solidFill>
-                <a:srgbClr val="525C65"/>
-              </a:solidFill>
-              <a:highlight>
-                <a:srgbClr val="FFFFFF"/>
-              </a:highlight>
-              <a:latin typeface="Open Sans"/>
-              <a:ea typeface="Open Sans"/>
-              <a:cs typeface="Open Sans"/>
-              <a:sym typeface="Open Sans"/>
-            </a:endParaRPr>
-          </a:p>
-          <a:p>
-            <a:pPr marL="0" lvl="0" indent="0" algn="just" rtl="0">
-              <a:lnSpc>
-                <a:spcPct val="170000"/>
-              </a:lnSpc>
-              <a:spcBef>
-                <a:spcPts val="1100"/>
-              </a:spcBef>
-              <a:spcAft>
-                <a:spcPts val="0"/>
-              </a:spcAft>
-              <a:buNone/>
-            </a:pPr>
-            <a:endParaRPr sz="1600">
-              <a:solidFill>
-                <a:srgbClr val="525C65"/>
-              </a:solidFill>
-              <a:highlight>
-                <a:srgbClr val="FFFFFF"/>
-              </a:highlight>
-              <a:latin typeface="Open Sans"/>
-              <a:ea typeface="Open Sans"/>
-              <a:cs typeface="Open Sans"/>
-              <a:sym typeface="Open Sans"/>
-            </a:endParaRPr>
-          </a:p>
-          <a:p>
-            <a:pPr marL="0" lvl="0" indent="0" algn="just" rtl="0">
-              <a:lnSpc>
-                <a:spcPct val="170000"/>
-              </a:lnSpc>
-              <a:spcBef>
-                <a:spcPts val="1100"/>
-              </a:spcBef>
-              <a:spcAft>
-                <a:spcPts val="1100"/>
-              </a:spcAft>
-              <a:buNone/>
-            </a:pPr>
-            <a:r>
-              <a:rPr lang="en" sz="1600">
-                <a:solidFill>
-                  <a:srgbClr val="525C65"/>
-                </a:solidFill>
-                <a:highlight>
-                  <a:srgbClr val="FFFFFF"/>
-                </a:highlight>
-                <a:latin typeface="Open Sans"/>
-                <a:ea typeface="Open Sans"/>
-                <a:cs typeface="Open Sans"/>
-                <a:sym typeface="Open Sans"/>
-              </a:rPr>
-              <a:t>Make sure you fill out </a:t>
-            </a:r>
-            <a:r>
-              <a:rPr lang="en" sz="1600" b="1">
-                <a:solidFill>
-                  <a:srgbClr val="525C65"/>
-                </a:solidFill>
-                <a:highlight>
-                  <a:srgbClr val="FFFFFF"/>
-                </a:highlight>
-                <a:latin typeface="Open Sans"/>
-                <a:ea typeface="Open Sans"/>
-                <a:cs typeface="Open Sans"/>
-                <a:sym typeface="Open Sans"/>
-              </a:rPr>
-              <a:t>all</a:t>
-            </a:r>
-            <a:r>
-              <a:rPr lang="en" sz="1600">
-                <a:solidFill>
-                  <a:srgbClr val="525C65"/>
-                </a:solidFill>
-                <a:highlight>
-                  <a:srgbClr val="FFFFFF"/>
-                </a:highlight>
-                <a:latin typeface="Open Sans"/>
-                <a:ea typeface="Open Sans"/>
-                <a:cs typeface="Open Sans"/>
-                <a:sym typeface="Open Sans"/>
-              </a:rPr>
-              <a:t> columns in the "Data Quality Issues" tab with your answers in the provided Sheets template.</a:t>
-            </a:r>
-            <a:endParaRPr sz="1600">
-              <a:solidFill>
-                <a:srgbClr val="525C65"/>
-              </a:solidFill>
-              <a:highlight>
-                <a:srgbClr val="FFFFFF"/>
-              </a:highlight>
-              <a:latin typeface="Open Sans"/>
-              <a:ea typeface="Open Sans"/>
-              <a:cs typeface="Open Sans"/>
-              <a:sym typeface="Open Sans"/>
-            </a:endParaRPr>
-          </a:p>
-        </p:txBody>
-      </p:sp>
-    </p:spTree>
-  </p:cSld>
-  <p:clrMapOvr>
-    <a:masterClrMapping/>
-  </p:clrMapOvr>
-</p:sld>
-</file>
-
-<file path=ppt/slides/slide11.xml><?xml version="1.0" encoding="utf-8"?>
 <p:sld xmlns:a="http://schemas.openxmlformats.org/drawingml/2006/main" xmlns:r="http://schemas.openxmlformats.org/officeDocument/2006/relationships" xmlns:p="http://schemas.openxmlformats.org/presentationml/2006/main">
   <p:cSld>
     <p:bg>
@@ -27634,7 +27326,7 @@
 </p:sld>
 </file>
 
-<file path=ppt/slides/slide12.xml><?xml version="1.0" encoding="utf-8"?>
+<file path=ppt/slides/slide11.xml><?xml version="1.0" encoding="utf-8"?>
 <p:sld xmlns:a="http://schemas.openxmlformats.org/drawingml/2006/main" xmlns:r="http://schemas.openxmlformats.org/officeDocument/2006/relationships" xmlns:p="http://schemas.openxmlformats.org/presentationml/2006/main">
   <p:cSld>
     <p:spTree>
@@ -27799,7 +27491,7 @@
 </p:sld>
 </file>
 
-<file path=ppt/slides/slide13.xml><?xml version="1.0" encoding="utf-8"?>
+<file path=ppt/slides/slide12.xml><?xml version="1.0" encoding="utf-8"?>
 <p:sld xmlns:a="http://schemas.openxmlformats.org/drawingml/2006/main" xmlns:r="http://schemas.openxmlformats.org/officeDocument/2006/relationships" xmlns:p="http://schemas.openxmlformats.org/presentationml/2006/main">
   <p:cSld>
     <p:bg>
@@ -28030,7 +27722,7 @@
 </p:sld>
 </file>
 
-<file path=ppt/slides/slide14.xml><?xml version="1.0" encoding="utf-8"?>
+<file path=ppt/slides/slide13.xml><?xml version="1.0" encoding="utf-8"?>
 <p:sld xmlns:a="http://schemas.openxmlformats.org/drawingml/2006/main" xmlns:r="http://schemas.openxmlformats.org/officeDocument/2006/relationships" xmlns:p="http://schemas.openxmlformats.org/presentationml/2006/main">
   <p:cSld>
     <p:spTree>
@@ -28148,7 +27840,7 @@
 </p:sld>
 </file>
 
-<file path=ppt/slides/slide15.xml><?xml version="1.0" encoding="utf-8"?>
+<file path=ppt/slides/slide14.xml><?xml version="1.0" encoding="utf-8"?>
 <p:sld xmlns:a="http://schemas.openxmlformats.org/drawingml/2006/main" xmlns:r="http://schemas.openxmlformats.org/officeDocument/2006/relationships" xmlns:p="http://schemas.openxmlformats.org/presentationml/2006/main">
   <p:cSld>
     <p:spTree>
@@ -28526,7 +28218,7 @@
 </p:sld>
 </file>
 
-<file path=ppt/slides/slide16.xml><?xml version="1.0" encoding="utf-8"?>
+<file path=ppt/slides/slide15.xml><?xml version="1.0" encoding="utf-8"?>
 <p:sld xmlns:a="http://schemas.openxmlformats.org/drawingml/2006/main" xmlns:r="http://schemas.openxmlformats.org/officeDocument/2006/relationships" xmlns:p="http://schemas.openxmlformats.org/presentationml/2006/main">
   <p:cSld>
     <p:bg>
@@ -28757,7 +28449,7 @@
 </p:sld>
 </file>
 
-<file path=ppt/slides/slide17.xml><?xml version="1.0" encoding="utf-8"?>
+<file path=ppt/slides/slide16.xml><?xml version="1.0" encoding="utf-8"?>
 <p:sld xmlns:a="http://schemas.openxmlformats.org/drawingml/2006/main" xmlns:r="http://schemas.openxmlformats.org/officeDocument/2006/relationships" xmlns:p="http://schemas.openxmlformats.org/presentationml/2006/main">
   <p:cSld>
     <p:spTree>
@@ -30044,7 +29736,7 @@
 </p:sld>
 </file>
 
-<file path=ppt/slides/slide18.xml><?xml version="1.0" encoding="utf-8"?>
+<file path=ppt/slides/slide17.xml><?xml version="1.0" encoding="utf-8"?>
 <p:sld xmlns:a="http://schemas.openxmlformats.org/drawingml/2006/main" xmlns:r="http://schemas.openxmlformats.org/officeDocument/2006/relationships" xmlns:p="http://schemas.openxmlformats.org/presentationml/2006/main">
   <p:cSld>
     <p:bg>
@@ -30275,7 +29967,7 @@
 </p:sld>
 </file>
 
-<file path=ppt/slides/slide19.xml><?xml version="1.0" encoding="utf-8"?>
+<file path=ppt/slides/slide18.xml><?xml version="1.0" encoding="utf-8"?>
 <p:sld xmlns:a="http://schemas.openxmlformats.org/drawingml/2006/main" xmlns:r="http://schemas.openxmlformats.org/officeDocument/2006/relationships" xmlns:p="http://schemas.openxmlformats.org/presentationml/2006/main">
   <p:cSld>
     <p:spTree>
@@ -30419,7 +30111,7 @@
                 <a:ea typeface="Open Sans" panose="020B0606030504020204" pitchFamily="34" charset="0"/>
                 <a:cs typeface="Open Sans" panose="020B0606030504020204" pitchFamily="34" charset="0"/>
               </a:rPr>
-              <a:t>Data Architect should be responsible for maintaining the enterprise data model, data </a:t>
+              <a:t>A Data Architect should be responsible for maintaining the enterprise data model, data </a:t>
             </a:r>
             <a:r>
               <a:rPr lang="en-GB" dirty="0" err="1">
@@ -31376,186 +31068,6 @@
   <p:cSld>
     <p:spTree>
       <p:nvGrpSpPr>
-        <p:cNvPr id="1" name="Shape 222"/>
-        <p:cNvGrpSpPr/>
-        <p:nvPr/>
-      </p:nvGrpSpPr>
-      <p:grpSpPr>
-        <a:xfrm>
-          <a:off x="0" y="0"/>
-          <a:ext cx="0" cy="0"/>
-          <a:chOff x="0" y="0"/>
-          <a:chExt cx="0" cy="0"/>
-        </a:xfrm>
-      </p:grpSpPr>
-      <p:sp>
-        <p:nvSpPr>
-          <p:cNvPr id="223" name="Google Shape;223;p57"/>
-          <p:cNvSpPr txBox="1"/>
-          <p:nvPr/>
-        </p:nvSpPr>
-        <p:spPr>
-          <a:xfrm>
-            <a:off x="0" y="-352425"/>
-            <a:ext cx="7772400" cy="3977100"/>
-          </a:xfrm>
-          <a:prstGeom prst="rect">
-            <a:avLst/>
-          </a:prstGeom>
-          <a:noFill/>
-          <a:ln>
-            <a:noFill/>
-          </a:ln>
-        </p:spPr>
-        <p:txBody>
-          <a:bodyPr spcFirstLastPara="1" wrap="square" lIns="91425" tIns="91425" rIns="91425" bIns="91425" anchor="t" anchorCtr="0">
-            <a:noAutofit/>
-          </a:bodyPr>
-          <a:lstStyle/>
-          <a:p>
-            <a:pPr marL="241300" marR="241300" lvl="0" indent="0" algn="just" rtl="0">
-              <a:lnSpc>
-                <a:spcPct val="170000"/>
-              </a:lnSpc>
-              <a:spcBef>
-                <a:spcPts val="3800"/>
-              </a:spcBef>
-              <a:spcAft>
-                <a:spcPts val="1100"/>
-              </a:spcAft>
-              <a:buNone/>
-            </a:pPr>
-            <a:r>
-              <a:rPr lang="en" sz="1600">
-                <a:solidFill>
-                  <a:srgbClr val="525C65"/>
-                </a:solidFill>
-                <a:highlight>
-                  <a:srgbClr val="FFFFFF"/>
-                </a:highlight>
-                <a:latin typeface="Open Sans"/>
-                <a:ea typeface="Open Sans"/>
-                <a:cs typeface="Open Sans"/>
-                <a:sym typeface="Open Sans"/>
-              </a:rPr>
-              <a:t>Create a </a:t>
-            </a:r>
-            <a:r>
-              <a:rPr lang="en" sz="1600" b="1">
-                <a:solidFill>
-                  <a:srgbClr val="525C65"/>
-                </a:solidFill>
-                <a:highlight>
-                  <a:srgbClr val="FFFFFF"/>
-                </a:highlight>
-                <a:latin typeface="Open Sans"/>
-                <a:ea typeface="Open Sans"/>
-                <a:cs typeface="Open Sans"/>
-                <a:sym typeface="Open Sans"/>
-              </a:rPr>
-              <a:t>conceptual</a:t>
-            </a:r>
-            <a:r>
-              <a:rPr lang="en" sz="1600">
-                <a:solidFill>
-                  <a:srgbClr val="525C65"/>
-                </a:solidFill>
-                <a:highlight>
-                  <a:srgbClr val="FFFFFF"/>
-                </a:highlight>
-                <a:latin typeface="Open Sans"/>
-                <a:ea typeface="Open Sans"/>
-                <a:cs typeface="Open Sans"/>
-                <a:sym typeface="Open Sans"/>
-              </a:rPr>
-              <a:t> data model that will provide SneakerPark with a holistic view of its data systems and help you grasp the organization's </a:t>
-            </a:r>
-            <a:r>
-              <a:rPr lang="en" sz="1600" b="1">
-                <a:solidFill>
-                  <a:srgbClr val="525C65"/>
-                </a:solidFill>
-                <a:highlight>
-                  <a:srgbClr val="FFFFFF"/>
-                </a:highlight>
-                <a:latin typeface="Open Sans"/>
-                <a:ea typeface="Open Sans"/>
-                <a:cs typeface="Open Sans"/>
-                <a:sym typeface="Open Sans"/>
-              </a:rPr>
-              <a:t>important entities and relationships</a:t>
-            </a:r>
-            <a:r>
-              <a:rPr lang="en" sz="1600">
-                <a:solidFill>
-                  <a:srgbClr val="525C65"/>
-                </a:solidFill>
-                <a:highlight>
-                  <a:srgbClr val="FFFFFF"/>
-                </a:highlight>
-                <a:latin typeface="Open Sans"/>
-                <a:ea typeface="Open Sans"/>
-                <a:cs typeface="Open Sans"/>
-                <a:sym typeface="Open Sans"/>
-              </a:rPr>
-              <a:t>, which will be instrumental as you move further in the project. You can use Lucidchart or any other diagramming tool of your choice, but please use the Crow’s Foot/IE Notation and please be sure to indicate both cardinality (the type of a relationship such as 1:N or N:N) and optionality (whether the relationship is optional or mandatory).</a:t>
-            </a:r>
-            <a:endParaRPr sz="1600">
-              <a:solidFill>
-                <a:srgbClr val="525C65"/>
-              </a:solidFill>
-              <a:highlight>
-                <a:srgbClr val="FFFFFF"/>
-              </a:highlight>
-              <a:latin typeface="Open Sans"/>
-              <a:ea typeface="Open Sans"/>
-              <a:cs typeface="Open Sans"/>
-              <a:sym typeface="Open Sans"/>
-            </a:endParaRPr>
-          </a:p>
-        </p:txBody>
-      </p:sp>
-      <p:pic>
-        <p:nvPicPr>
-          <p:cNvPr id="224" name="Google Shape;224;p57"/>
-          <p:cNvPicPr preferRelativeResize="0"/>
-          <p:nvPr/>
-        </p:nvPicPr>
-        <p:blipFill>
-          <a:blip r:embed="rId3">
-            <a:alphaModFix/>
-          </a:blip>
-          <a:stretch>
-            <a:fillRect/>
-          </a:stretch>
-        </p:blipFill>
-        <p:spPr>
-          <a:xfrm>
-            <a:off x="1395550" y="4276725"/>
-            <a:ext cx="4781550" cy="1504950"/>
-          </a:xfrm>
-          <a:prstGeom prst="rect">
-            <a:avLst/>
-          </a:prstGeom>
-          <a:noFill/>
-          <a:ln>
-            <a:noFill/>
-          </a:ln>
-        </p:spPr>
-      </p:pic>
-    </p:spTree>
-  </p:cSld>
-  <p:clrMapOvr>
-    <a:masterClrMapping/>
-  </p:clrMapOvr>
-</p:sld>
-</file>
-
-<file path=ppt/slides/slide6.xml><?xml version="1.0" encoding="utf-8"?>
-<p:sld xmlns:a="http://schemas.openxmlformats.org/drawingml/2006/main" xmlns:r="http://schemas.openxmlformats.org/officeDocument/2006/relationships" xmlns:p="http://schemas.openxmlformats.org/presentationml/2006/main">
-  <p:cSld>
-    <p:spTree>
-      <p:nvGrpSpPr>
         <p:cNvPr id="1" name="Shape 228"/>
         <p:cNvGrpSpPr/>
         <p:nvPr/>
@@ -31688,7 +31200,7 @@
 </p:sld>
 </file>
 
-<file path=ppt/slides/slide7.xml><?xml version="1.0" encoding="utf-8"?>
+<file path=ppt/slides/slide6.xml><?xml version="1.0" encoding="utf-8"?>
 <p:sld xmlns:a="http://schemas.openxmlformats.org/drawingml/2006/main" xmlns:r="http://schemas.openxmlformats.org/officeDocument/2006/relationships" xmlns:p="http://schemas.openxmlformats.org/presentationml/2006/main">
   <p:cSld>
     <p:bg>
@@ -31880,7 +31392,7 @@
 </p:sld>
 </file>
 
-<file path=ppt/slides/slide8.xml><?xml version="1.0" encoding="utf-8"?>
+<file path=ppt/slides/slide7.xml><?xml version="1.0" encoding="utf-8"?>
 <p:sld xmlns:a="http://schemas.openxmlformats.org/drawingml/2006/main" xmlns:r="http://schemas.openxmlformats.org/officeDocument/2006/relationships" xmlns:p="http://schemas.openxmlformats.org/presentationml/2006/main">
   <p:cSld>
     <p:spTree>
@@ -31911,8 +31423,8 @@
         </p:nvSpPr>
         <p:spPr>
           <a:xfrm>
-            <a:off x="373791" y="486774"/>
-            <a:ext cx="7052619" cy="1169551"/>
+            <a:off x="359890" y="597985"/>
+            <a:ext cx="7052619" cy="1077218"/>
           </a:xfrm>
           <a:prstGeom prst="rect">
             <a:avLst/>
@@ -31926,15 +31438,15 @@
           <a:lstStyle/>
           <a:p>
             <a:r>
-              <a:rPr lang="en-GB" dirty="0">
+              <a:rPr lang="en-GB" sz="1600" b="1" dirty="0">
                 <a:latin typeface="Open Sans" panose="020B0606030504020204" pitchFamily="34" charset="0"/>
                 <a:ea typeface="Open Sans" panose="020B0606030504020204" pitchFamily="34" charset="0"/>
                 <a:cs typeface="Open Sans" panose="020B0606030504020204" pitchFamily="34" charset="0"/>
               </a:rPr>
-              <a:t>The metadata for all source systems was documented in the Data Dictionary and Enterprise Data </a:t>
+              <a:t>Metadata (Enterprise Data </a:t>
             </a:r>
             <a:r>
-              <a:rPr lang="en-GB" dirty="0" err="1">
+              <a:rPr lang="en-GB" sz="1600" b="1" dirty="0" err="1">
                 <a:latin typeface="Open Sans" panose="020B0606030504020204" pitchFamily="34" charset="0"/>
                 <a:ea typeface="Open Sans" panose="020B0606030504020204" pitchFamily="34" charset="0"/>
                 <a:cs typeface="Open Sans" panose="020B0606030504020204" pitchFamily="34" charset="0"/>
@@ -31942,37 +31454,32 @@
               <a:t>Catalog</a:t>
             </a:r>
             <a:r>
-              <a:rPr lang="en-GB" dirty="0">
+              <a:rPr lang="en-GB" sz="1600" b="1" dirty="0">
                 <a:latin typeface="Open Sans" panose="020B0606030504020204" pitchFamily="34" charset="0"/>
                 <a:ea typeface="Open Sans" panose="020B0606030504020204" pitchFamily="34" charset="0"/>
                 <a:cs typeface="Open Sans" panose="020B0606030504020204" pitchFamily="34" charset="0"/>
               </a:rPr>
-              <a:t> tabs of the provided spreadsheet template.</a:t>
+              <a:t> &amp; Data Dictionary)</a:t>
             </a:r>
-            <a:br>
-              <a:rPr lang="en-GB" dirty="0">
+          </a:p>
+          <a:p>
+            <a:endParaRPr lang="en-GB" sz="1600" b="1" dirty="0">
+              <a:latin typeface="Open Sans" panose="020B0606030504020204" pitchFamily="34" charset="0"/>
+              <a:ea typeface="Open Sans" panose="020B0606030504020204" pitchFamily="34" charset="0"/>
+              <a:cs typeface="Open Sans" panose="020B0606030504020204" pitchFamily="34" charset="0"/>
+            </a:endParaRPr>
+          </a:p>
+          <a:p>
+            <a:r>
+              <a:rPr lang="en-GB" sz="1600" dirty="0">
                 <a:latin typeface="Open Sans" panose="020B0606030504020204" pitchFamily="34" charset="0"/>
                 <a:ea typeface="Open Sans" panose="020B0606030504020204" pitchFamily="34" charset="0"/>
                 <a:cs typeface="Open Sans" panose="020B0606030504020204" pitchFamily="34" charset="0"/>
               </a:rPr>
-            </a:br>
-            <a:br>
-              <a:rPr lang="en-GB" dirty="0">
-                <a:latin typeface="Open Sans" panose="020B0606030504020204" pitchFamily="34" charset="0"/>
-                <a:ea typeface="Open Sans" panose="020B0606030504020204" pitchFamily="34" charset="0"/>
-                <a:cs typeface="Open Sans" panose="020B0606030504020204" pitchFamily="34" charset="0"/>
-              </a:rPr>
-            </a:br>
-            <a:r>
-              <a:rPr lang="en-GB" dirty="0">
-                <a:latin typeface="Open Sans" panose="020B0606030504020204" pitchFamily="34" charset="0"/>
-                <a:ea typeface="Open Sans" panose="020B0606030504020204" pitchFamily="34" charset="0"/>
-                <a:cs typeface="Open Sans" panose="020B0606030504020204" pitchFamily="34" charset="0"/>
-              </a:rPr>
-              <a:t>The completed Metadata </a:t>
+              <a:t>The Enterprise Data </a:t>
             </a:r>
             <a:r>
-              <a:rPr lang="en-GB" dirty="0" err="1">
+              <a:rPr lang="en-GB" sz="1600" dirty="0" err="1">
                 <a:latin typeface="Open Sans" panose="020B0606030504020204" pitchFamily="34" charset="0"/>
                 <a:ea typeface="Open Sans" panose="020B0606030504020204" pitchFamily="34" charset="0"/>
                 <a:cs typeface="Open Sans" panose="020B0606030504020204" pitchFamily="34" charset="0"/>
@@ -31980,12 +31487,12 @@
               <a:t>Catalog</a:t>
             </a:r>
             <a:r>
-              <a:rPr lang="en-GB" dirty="0">
+              <a:rPr lang="en-GB" sz="1600" dirty="0">
                 <a:latin typeface="Open Sans" panose="020B0606030504020204" pitchFamily="34" charset="0"/>
                 <a:ea typeface="Open Sans" panose="020B0606030504020204" pitchFamily="34" charset="0"/>
                 <a:cs typeface="Open Sans" panose="020B0606030504020204" pitchFamily="34" charset="0"/>
               </a:rPr>
-              <a:t> spreadsheet has been provided separately and is available in the project repository:</a:t>
+              <a:t> and Data Dictionary have been completed in the accompanying spreadsheet template submitted with this project.</a:t>
             </a:r>
           </a:p>
         </p:txBody>
@@ -31998,7 +31505,7 @@
 </p:sld>
 </file>
 
-<file path=ppt/slides/slide9.xml><?xml version="1.0" encoding="utf-8"?>
+<file path=ppt/slides/slide8.xml><?xml version="1.0" encoding="utf-8"?>
 <p:sld xmlns:a="http://schemas.openxmlformats.org/drawingml/2006/main" xmlns:r="http://schemas.openxmlformats.org/officeDocument/2006/relationships" xmlns:p="http://schemas.openxmlformats.org/presentationml/2006/main">
   <p:cSld>
     <p:bg>
@@ -32217,6 +31724,108 @@
               <a:ea typeface="Helvetica Neue"/>
               <a:cs typeface="Helvetica Neue"/>
               <a:sym typeface="Helvetica Neue"/>
+            </a:endParaRPr>
+          </a:p>
+        </p:txBody>
+      </p:sp>
+    </p:spTree>
+  </p:cSld>
+  <p:clrMapOvr>
+    <a:masterClrMapping/>
+  </p:clrMapOvr>
+</p:sld>
+</file>
+
+<file path=ppt/slides/slide9.xml><?xml version="1.0" encoding="utf-8"?>
+<p:sld xmlns:a="http://schemas.openxmlformats.org/drawingml/2006/main" xmlns:r="http://schemas.openxmlformats.org/officeDocument/2006/relationships" xmlns:p="http://schemas.openxmlformats.org/presentationml/2006/main">
+  <p:cSld>
+    <p:spTree>
+      <p:nvGrpSpPr>
+        <p:cNvPr id="1" name="Shape 251"/>
+        <p:cNvGrpSpPr/>
+        <p:nvPr/>
+      </p:nvGrpSpPr>
+      <p:grpSpPr>
+        <a:xfrm>
+          <a:off x="0" y="0"/>
+          <a:ext cx="0" cy="0"/>
+          <a:chOff x="0" y="0"/>
+          <a:chExt cx="0" cy="0"/>
+        </a:xfrm>
+      </p:grpSpPr>
+      <p:sp>
+        <p:nvSpPr>
+          <p:cNvPr id="252" name="Google Shape;252;p62"/>
+          <p:cNvSpPr txBox="1"/>
+          <p:nvPr/>
+        </p:nvSpPr>
+        <p:spPr>
+          <a:xfrm>
+            <a:off x="480900" y="573956"/>
+            <a:ext cx="6810600" cy="2280455"/>
+          </a:xfrm>
+          <a:prstGeom prst="rect">
+            <a:avLst/>
+          </a:prstGeom>
+          <a:noFill/>
+          <a:ln>
+            <a:noFill/>
+          </a:ln>
+        </p:spPr>
+        <p:txBody>
+          <a:bodyPr spcFirstLastPara="1" wrap="square" lIns="91425" tIns="91425" rIns="91425" bIns="91425" anchor="t" anchorCtr="0">
+            <a:noAutofit/>
+          </a:bodyPr>
+          <a:lstStyle/>
+          <a:p>
+            <a:r>
+              <a:rPr lang="en-GB" sz="1600" b="1" dirty="0">
+                <a:latin typeface="Open Sans" panose="020B0606030504020204" pitchFamily="34" charset="0"/>
+                <a:ea typeface="Open Sans" panose="020B0606030504020204" pitchFamily="34" charset="0"/>
+                <a:cs typeface="Open Sans" panose="020B0606030504020204" pitchFamily="34" charset="0"/>
+              </a:rPr>
+              <a:t>Data Quality</a:t>
+            </a:r>
+          </a:p>
+          <a:p>
+            <a:endParaRPr lang="en-GB" sz="1600" b="1" dirty="0">
+              <a:latin typeface="Open Sans" panose="020B0606030504020204" pitchFamily="34" charset="0"/>
+              <a:ea typeface="Open Sans" panose="020B0606030504020204" pitchFamily="34" charset="0"/>
+              <a:cs typeface="Open Sans" panose="020B0606030504020204" pitchFamily="34" charset="0"/>
+            </a:endParaRPr>
+          </a:p>
+          <a:p>
+            <a:r>
+              <a:rPr lang="en-GB" sz="1600" dirty="0">
+                <a:latin typeface="Open Sans" panose="020B0606030504020204" pitchFamily="34" charset="0"/>
+                <a:ea typeface="Open Sans" panose="020B0606030504020204" pitchFamily="34" charset="0"/>
+                <a:cs typeface="Open Sans" panose="020B0606030504020204" pitchFamily="34" charset="0"/>
+              </a:rPr>
+              <a:t>Four data quality issues were identified during profiling, including one foreseeable future issue.</a:t>
+            </a:r>
+          </a:p>
+          <a:p>
+            <a:endParaRPr lang="en-GB" sz="1600" dirty="0"/>
+          </a:p>
+          <a:p>
+            <a:r>
+              <a:rPr lang="en-GB" sz="1600" dirty="0">
+                <a:latin typeface="Open Sans" panose="020B0606030504020204" pitchFamily="34" charset="0"/>
+                <a:ea typeface="Open Sans" panose="020B0606030504020204" pitchFamily="34" charset="0"/>
+                <a:cs typeface="Open Sans" panose="020B0606030504020204" pitchFamily="34" charset="0"/>
+              </a:rPr>
+              <a:t>The Data Quality Issues, Rules, Metrics and Dashboard supporting information have been completed in the accompanying spreadsheet template submitted with this project.</a:t>
+            </a:r>
+            <a:endParaRPr lang="en-GB" sz="1600" dirty="0">
+              <a:solidFill>
+                <a:srgbClr val="525C65"/>
+              </a:solidFill>
+              <a:highlight>
+                <a:srgbClr val="FFFFFF"/>
+              </a:highlight>
+              <a:latin typeface="Open Sans"/>
+              <a:ea typeface="Open Sans"/>
+              <a:cs typeface="Open Sans"/>
             </a:endParaRPr>
           </a:p>
         </p:txBody>
